--- a/docs/pptx/whole/ritu-linsubhr-disc-throm3.pptx
+++ b/docs/pptx/whole/ritu-linsubhr-disc-throm3.pptx
@@ -2443,7 +2443,7 @@
           </p:nvSpPr>
           <p:spPr>
             <a:xfrm>
-              <a:off x="1942521" y="2073503"/>
+              <a:off x="1943067" y="2073503"/>
               <a:ext cx="0" cy="3649639"/>
             </a:xfrm>
             <a:custGeom>
@@ -2486,7 +2486,7 @@
           </p:nvSpPr>
           <p:spPr>
             <a:xfrm>
-              <a:off x="4460699" y="2073503"/>
+              <a:off x="4460487" y="2073503"/>
               <a:ext cx="0" cy="3649639"/>
             </a:xfrm>
             <a:custGeom>
@@ -2529,7 +2529,7 @@
           </p:nvSpPr>
           <p:spPr>
             <a:xfrm>
-              <a:off x="6978877" y="2073503"/>
+              <a:off x="6977907" y="2073503"/>
               <a:ext cx="0" cy="3649639"/>
             </a:xfrm>
             <a:custGeom>
@@ -2787,7 +2787,7 @@
           </p:nvSpPr>
           <p:spPr>
             <a:xfrm>
-              <a:off x="3201610" y="2073503"/>
+              <a:off x="3201777" y="2073503"/>
               <a:ext cx="0" cy="3649639"/>
             </a:xfrm>
             <a:custGeom>
@@ -2830,7 +2830,7 @@
           </p:nvSpPr>
           <p:spPr>
             <a:xfrm>
-              <a:off x="5719788" y="2073503"/>
+              <a:off x="5719197" y="2073503"/>
               <a:ext cx="0" cy="3649639"/>
             </a:xfrm>
             <a:custGeom>
@@ -2873,7 +2873,7 @@
           </p:nvSpPr>
           <p:spPr>
             <a:xfrm>
-              <a:off x="8237966" y="2073503"/>
+              <a:off x="8236616" y="2073503"/>
               <a:ext cx="0" cy="3649639"/>
             </a:xfrm>
             <a:custGeom>
@@ -2917,473 +2917,470 @@
           <p:spPr>
             <a:xfrm>
               <a:off x="1172049" y="2073503"/>
-              <a:ext cx="7090630" cy="3434751"/>
+              <a:ext cx="7090630" cy="3438290"/>
             </a:xfrm>
             <a:custGeom>
               <a:avLst/>
               <a:pathLst>
-                <a:path w="7090630" h="3434751">
+                <a:path w="7090630" h="3438290">
                   <a:moveTo>
-                    <a:pt x="3354687" y="0"/>
+                    <a:pt x="3401452" y="0"/>
                   </a:moveTo>
                   <a:lnTo>
-                    <a:pt x="3366258" y="47286"/>
-                  </a:lnTo>
-                  <a:lnTo>
-                    <a:pt x="3437881" y="317008"/>
-                  </a:lnTo>
-                  <a:lnTo>
-                    <a:pt x="3509503" y="565561"/>
-                  </a:lnTo>
-                  <a:lnTo>
-                    <a:pt x="3581126" y="794604"/>
-                  </a:lnTo>
-                  <a:lnTo>
-                    <a:pt x="3652748" y="1005671"/>
-                  </a:lnTo>
-                  <a:lnTo>
-                    <a:pt x="3724371" y="1200171"/>
-                  </a:lnTo>
-                  <a:lnTo>
-                    <a:pt x="3795993" y="1379405"/>
-                  </a:lnTo>
-                  <a:lnTo>
-                    <a:pt x="3867616" y="1544572"/>
-                  </a:lnTo>
-                  <a:lnTo>
-                    <a:pt x="3939238" y="1696774"/>
-                  </a:lnTo>
-                  <a:lnTo>
-                    <a:pt x="4010861" y="1837031"/>
-                  </a:lnTo>
-                  <a:lnTo>
-                    <a:pt x="4082483" y="1966279"/>
-                  </a:lnTo>
-                  <a:lnTo>
-                    <a:pt x="4154106" y="2085383"/>
-                  </a:lnTo>
-                  <a:lnTo>
-                    <a:pt x="4225729" y="2195138"/>
-                  </a:lnTo>
-                  <a:lnTo>
-                    <a:pt x="4297351" y="2296279"/>
-                  </a:lnTo>
-                  <a:lnTo>
-                    <a:pt x="4368974" y="2389481"/>
-                  </a:lnTo>
-                  <a:lnTo>
-                    <a:pt x="4440596" y="2475369"/>
-                  </a:lnTo>
-                  <a:lnTo>
-                    <a:pt x="4512219" y="2554515"/>
-                  </a:lnTo>
-                  <a:lnTo>
-                    <a:pt x="4583841" y="2627448"/>
-                  </a:lnTo>
-                  <a:lnTo>
-                    <a:pt x="4655464" y="2655792"/>
-                  </a:lnTo>
-                  <a:lnTo>
-                    <a:pt x="4727086" y="2658258"/>
-                  </a:lnTo>
-                  <a:lnTo>
-                    <a:pt x="4798709" y="2660716"/>
-                  </a:lnTo>
-                  <a:lnTo>
-                    <a:pt x="4870331" y="2663168"/>
-                  </a:lnTo>
-                  <a:lnTo>
-                    <a:pt x="4941954" y="2665612"/>
-                  </a:lnTo>
-                  <a:lnTo>
-                    <a:pt x="5013576" y="2668049"/>
-                  </a:lnTo>
-                  <a:lnTo>
-                    <a:pt x="5085199" y="2670478"/>
-                  </a:lnTo>
-                  <a:lnTo>
-                    <a:pt x="5156821" y="2672900"/>
-                  </a:lnTo>
-                  <a:lnTo>
-                    <a:pt x="5228444" y="2675315"/>
-                  </a:lnTo>
-                  <a:lnTo>
-                    <a:pt x="5300066" y="2677723"/>
-                  </a:lnTo>
-                  <a:lnTo>
-                    <a:pt x="5371689" y="2680124"/>
-                  </a:lnTo>
-                  <a:lnTo>
-                    <a:pt x="5443311" y="2682517"/>
-                  </a:lnTo>
-                  <a:lnTo>
-                    <a:pt x="5514934" y="2684904"/>
-                  </a:lnTo>
-                  <a:lnTo>
-                    <a:pt x="5586557" y="2687283"/>
-                  </a:lnTo>
-                  <a:lnTo>
-                    <a:pt x="5658179" y="2689655"/>
-                  </a:lnTo>
-                  <a:lnTo>
-                    <a:pt x="5729802" y="2692020"/>
-                  </a:lnTo>
-                  <a:lnTo>
-                    <a:pt x="5801424" y="2694378"/>
-                  </a:lnTo>
-                  <a:lnTo>
-                    <a:pt x="5873047" y="2696729"/>
-                  </a:lnTo>
-                  <a:lnTo>
-                    <a:pt x="5944669" y="2699073"/>
-                  </a:lnTo>
-                  <a:lnTo>
-                    <a:pt x="6016292" y="2701410"/>
-                  </a:lnTo>
-                  <a:lnTo>
-                    <a:pt x="6087914" y="2703740"/>
-                  </a:lnTo>
-                  <a:lnTo>
-                    <a:pt x="6159537" y="2706064"/>
-                  </a:lnTo>
-                  <a:lnTo>
-                    <a:pt x="6231159" y="2708380"/>
-                  </a:lnTo>
-                  <a:lnTo>
-                    <a:pt x="6302782" y="2710689"/>
-                  </a:lnTo>
-                  <a:lnTo>
-                    <a:pt x="6374404" y="2712992"/>
-                  </a:lnTo>
-                  <a:lnTo>
-                    <a:pt x="6446027" y="2715287"/>
-                  </a:lnTo>
-                  <a:lnTo>
-                    <a:pt x="6517649" y="2717576"/>
-                  </a:lnTo>
-                  <a:lnTo>
-                    <a:pt x="6589272" y="2719858"/>
-                  </a:lnTo>
-                  <a:lnTo>
-                    <a:pt x="6660894" y="2722133"/>
-                  </a:lnTo>
-                  <a:lnTo>
-                    <a:pt x="6732517" y="2724401"/>
-                  </a:lnTo>
-                  <a:lnTo>
-                    <a:pt x="6804139" y="2726663"/>
-                  </a:lnTo>
-                  <a:lnTo>
-                    <a:pt x="6875762" y="2728918"/>
-                  </a:lnTo>
-                  <a:lnTo>
-                    <a:pt x="6947385" y="2731166"/>
-                  </a:lnTo>
-                  <a:lnTo>
-                    <a:pt x="7019007" y="2733408"/>
-                  </a:lnTo>
-                  <a:lnTo>
-                    <a:pt x="7090630" y="2735642"/>
-                  </a:lnTo>
-                  <a:lnTo>
-                    <a:pt x="7090630" y="3434751"/>
-                  </a:lnTo>
-                  <a:lnTo>
-                    <a:pt x="7019007" y="3430578"/>
-                  </a:lnTo>
-                  <a:lnTo>
-                    <a:pt x="6947385" y="3426050"/>
-                  </a:lnTo>
-                  <a:lnTo>
-                    <a:pt x="6875762" y="3421135"/>
-                  </a:lnTo>
-                  <a:lnTo>
-                    <a:pt x="6804139" y="3415803"/>
-                  </a:lnTo>
-                  <a:lnTo>
-                    <a:pt x="6732517" y="3410016"/>
-                  </a:lnTo>
-                  <a:lnTo>
-                    <a:pt x="6660894" y="3403736"/>
-                  </a:lnTo>
-                  <a:lnTo>
-                    <a:pt x="6589272" y="3396921"/>
-                  </a:lnTo>
-                  <a:lnTo>
-                    <a:pt x="6517649" y="3389526"/>
-                  </a:lnTo>
-                  <a:lnTo>
-                    <a:pt x="6446027" y="3381501"/>
-                  </a:lnTo>
-                  <a:lnTo>
-                    <a:pt x="6374404" y="3372792"/>
-                  </a:lnTo>
-                  <a:lnTo>
-                    <a:pt x="6302782" y="3363342"/>
-                  </a:lnTo>
-                  <a:lnTo>
-                    <a:pt x="6231159" y="3353086"/>
-                  </a:lnTo>
-                  <a:lnTo>
-                    <a:pt x="6159537" y="3341957"/>
-                  </a:lnTo>
-                  <a:lnTo>
-                    <a:pt x="6087914" y="3329881"/>
-                  </a:lnTo>
-                  <a:lnTo>
-                    <a:pt x="6016292" y="3316775"/>
-                  </a:lnTo>
-                  <a:lnTo>
-                    <a:pt x="5944669" y="3302554"/>
-                  </a:lnTo>
-                  <a:lnTo>
-                    <a:pt x="5873047" y="3287121"/>
-                  </a:lnTo>
-                  <a:lnTo>
-                    <a:pt x="5801424" y="3270374"/>
-                  </a:lnTo>
-                  <a:lnTo>
-                    <a:pt x="5729802" y="3252200"/>
-                  </a:lnTo>
-                  <a:lnTo>
-                    <a:pt x="5658179" y="3232479"/>
-                  </a:lnTo>
-                  <a:lnTo>
-                    <a:pt x="5586557" y="3211077"/>
-                  </a:lnTo>
-                  <a:lnTo>
-                    <a:pt x="5514934" y="3187853"/>
-                  </a:lnTo>
-                  <a:lnTo>
-                    <a:pt x="5443311" y="3162651"/>
-                  </a:lnTo>
-                  <a:lnTo>
-                    <a:pt x="5371689" y="3135302"/>
-                  </a:lnTo>
-                  <a:lnTo>
-                    <a:pt x="5300066" y="3105624"/>
-                  </a:lnTo>
-                  <a:lnTo>
-                    <a:pt x="5228444" y="3073418"/>
-                  </a:lnTo>
-                  <a:lnTo>
-                    <a:pt x="5156821" y="3038468"/>
-                  </a:lnTo>
-                  <a:lnTo>
-                    <a:pt x="5085199" y="3000542"/>
-                  </a:lnTo>
-                  <a:lnTo>
-                    <a:pt x="5013576" y="2959386"/>
-                  </a:lnTo>
-                  <a:lnTo>
-                    <a:pt x="4941954" y="2914725"/>
-                  </a:lnTo>
-                  <a:lnTo>
-                    <a:pt x="4870331" y="2866259"/>
-                  </a:lnTo>
-                  <a:lnTo>
-                    <a:pt x="4798709" y="2813665"/>
-                  </a:lnTo>
-                  <a:lnTo>
-                    <a:pt x="4727086" y="2756592"/>
-                  </a:lnTo>
-                  <a:lnTo>
-                    <a:pt x="4655464" y="2694658"/>
-                  </a:lnTo>
-                  <a:lnTo>
-                    <a:pt x="4583841" y="2653319"/>
-                  </a:lnTo>
-                  <a:lnTo>
-                    <a:pt x="4512219" y="2650838"/>
-                  </a:lnTo>
-                  <a:lnTo>
-                    <a:pt x="4440596" y="2648350"/>
-                  </a:lnTo>
-                  <a:lnTo>
-                    <a:pt x="4368974" y="2645854"/>
-                  </a:lnTo>
-                  <a:lnTo>
-                    <a:pt x="4297351" y="2643351"/>
-                  </a:lnTo>
-                  <a:lnTo>
-                    <a:pt x="4225729" y="2640841"/>
-                  </a:lnTo>
-                  <a:lnTo>
-                    <a:pt x="4154106" y="2638323"/>
-                  </a:lnTo>
-                  <a:lnTo>
-                    <a:pt x="4082483" y="2635797"/>
-                  </a:lnTo>
-                  <a:lnTo>
-                    <a:pt x="4010861" y="2633264"/>
-                  </a:lnTo>
-                  <a:lnTo>
-                    <a:pt x="3939238" y="2630723"/>
-                  </a:lnTo>
-                  <a:lnTo>
-                    <a:pt x="3867616" y="2628175"/>
-                  </a:lnTo>
-                  <a:lnTo>
-                    <a:pt x="3795993" y="2625619"/>
-                  </a:lnTo>
-                  <a:lnTo>
-                    <a:pt x="3724371" y="2623056"/>
-                  </a:lnTo>
-                  <a:lnTo>
-                    <a:pt x="3652748" y="2620485"/>
-                  </a:lnTo>
-                  <a:lnTo>
-                    <a:pt x="3581126" y="2617906"/>
-                  </a:lnTo>
-                  <a:lnTo>
-                    <a:pt x="3509503" y="2615319"/>
-                  </a:lnTo>
-                  <a:lnTo>
-                    <a:pt x="3437881" y="2612725"/>
-                  </a:lnTo>
-                  <a:lnTo>
-                    <a:pt x="3366258" y="2610123"/>
-                  </a:lnTo>
-                  <a:lnTo>
-                    <a:pt x="3294636" y="2607514"/>
-                  </a:lnTo>
-                  <a:lnTo>
-                    <a:pt x="3223013" y="2604896"/>
-                  </a:lnTo>
-                  <a:lnTo>
-                    <a:pt x="3151391" y="2602271"/>
-                  </a:lnTo>
-                  <a:lnTo>
-                    <a:pt x="3079768" y="2599637"/>
-                  </a:lnTo>
-                  <a:lnTo>
-                    <a:pt x="3008146" y="2596996"/>
-                  </a:lnTo>
-                  <a:lnTo>
-                    <a:pt x="2936523" y="2594347"/>
-                  </a:lnTo>
-                  <a:lnTo>
-                    <a:pt x="2864901" y="2591690"/>
-                  </a:lnTo>
-                  <a:lnTo>
-                    <a:pt x="2793278" y="2589026"/>
-                  </a:lnTo>
-                  <a:lnTo>
-                    <a:pt x="2721655" y="2586353"/>
-                  </a:lnTo>
-                  <a:lnTo>
-                    <a:pt x="2650033" y="2583672"/>
-                  </a:lnTo>
-                  <a:lnTo>
-                    <a:pt x="2578410" y="2580983"/>
-                  </a:lnTo>
-                  <a:lnTo>
-                    <a:pt x="2506788" y="2578287"/>
-                  </a:lnTo>
-                  <a:lnTo>
-                    <a:pt x="2435165" y="2575582"/>
-                  </a:lnTo>
-                  <a:lnTo>
-                    <a:pt x="2363543" y="2572869"/>
-                  </a:lnTo>
-                  <a:lnTo>
-                    <a:pt x="2291920" y="2570148"/>
-                  </a:lnTo>
-                  <a:lnTo>
-                    <a:pt x="2220298" y="2567418"/>
-                  </a:lnTo>
-                  <a:lnTo>
-                    <a:pt x="2148675" y="2564681"/>
-                  </a:lnTo>
-                  <a:lnTo>
-                    <a:pt x="2077053" y="2561936"/>
-                  </a:lnTo>
-                  <a:lnTo>
-                    <a:pt x="2005430" y="2559182"/>
-                  </a:lnTo>
-                  <a:lnTo>
-                    <a:pt x="1933808" y="2556420"/>
-                  </a:lnTo>
-                  <a:lnTo>
-                    <a:pt x="1862185" y="2553650"/>
-                  </a:lnTo>
-                  <a:lnTo>
-                    <a:pt x="1790563" y="2550871"/>
-                  </a:lnTo>
-                  <a:lnTo>
-                    <a:pt x="1718940" y="2548085"/>
-                  </a:lnTo>
-                  <a:lnTo>
-                    <a:pt x="1647318" y="2545290"/>
-                  </a:lnTo>
-                  <a:lnTo>
-                    <a:pt x="1575695" y="2542486"/>
-                  </a:lnTo>
-                  <a:lnTo>
-                    <a:pt x="1504073" y="2539674"/>
-                  </a:lnTo>
-                  <a:lnTo>
-                    <a:pt x="1432450" y="2536854"/>
-                  </a:lnTo>
-                  <a:lnTo>
-                    <a:pt x="1360827" y="2534025"/>
-                  </a:lnTo>
-                  <a:lnTo>
-                    <a:pt x="1289205" y="2531188"/>
-                  </a:lnTo>
-                  <a:lnTo>
-                    <a:pt x="1217582" y="2528343"/>
-                  </a:lnTo>
-                  <a:lnTo>
-                    <a:pt x="1145960" y="2525489"/>
-                  </a:lnTo>
-                  <a:lnTo>
-                    <a:pt x="1074337" y="2522626"/>
-                  </a:lnTo>
-                  <a:lnTo>
-                    <a:pt x="1002715" y="2519755"/>
-                  </a:lnTo>
-                  <a:lnTo>
-                    <a:pt x="931092" y="2516875"/>
-                  </a:lnTo>
-                  <a:lnTo>
-                    <a:pt x="859470" y="2513987"/>
-                  </a:lnTo>
-                  <a:lnTo>
-                    <a:pt x="787847" y="2511090"/>
-                  </a:lnTo>
-                  <a:lnTo>
-                    <a:pt x="716225" y="2508184"/>
-                  </a:lnTo>
-                  <a:lnTo>
-                    <a:pt x="644602" y="2505270"/>
-                  </a:lnTo>
-                  <a:lnTo>
-                    <a:pt x="572980" y="2502347"/>
-                  </a:lnTo>
-                  <a:lnTo>
-                    <a:pt x="501357" y="2499415"/>
-                  </a:lnTo>
-                  <a:lnTo>
-                    <a:pt x="429735" y="2496475"/>
-                  </a:lnTo>
-                  <a:lnTo>
-                    <a:pt x="358112" y="2493526"/>
-                  </a:lnTo>
-                  <a:lnTo>
-                    <a:pt x="286490" y="2490568"/>
-                  </a:lnTo>
-                  <a:lnTo>
-                    <a:pt x="214867" y="2487601"/>
-                  </a:lnTo>
-                  <a:lnTo>
-                    <a:pt x="143245" y="2484625"/>
-                  </a:lnTo>
-                  <a:lnTo>
-                    <a:pt x="71622" y="2481640"/>
-                  </a:lnTo>
-                  <a:lnTo>
-                    <a:pt x="0" y="2478647"/>
+                    <a:pt x="3437881" y="149039"/>
+                  </a:lnTo>
+                  <a:lnTo>
+                    <a:pt x="3509503" y="418397"/>
+                  </a:lnTo>
+                  <a:lnTo>
+                    <a:pt x="3581126" y="665997"/>
+                  </a:lnTo>
+                  <a:lnTo>
+                    <a:pt x="3652748" y="893598"/>
+                  </a:lnTo>
+                  <a:lnTo>
+                    <a:pt x="3724371" y="1102814"/>
+                  </a:lnTo>
+                  <a:lnTo>
+                    <a:pt x="3795993" y="1295131"/>
+                  </a:lnTo>
+                  <a:lnTo>
+                    <a:pt x="3867616" y="1471914"/>
+                  </a:lnTo>
+                  <a:lnTo>
+                    <a:pt x="3939238" y="1634418"/>
+                  </a:lnTo>
+                  <a:lnTo>
+                    <a:pt x="4010861" y="1783795"/>
+                  </a:lnTo>
+                  <a:lnTo>
+                    <a:pt x="4082483" y="1921107"/>
+                  </a:lnTo>
+                  <a:lnTo>
+                    <a:pt x="4154106" y="2047328"/>
+                  </a:lnTo>
+                  <a:lnTo>
+                    <a:pt x="4225729" y="2163353"/>
+                  </a:lnTo>
+                  <a:lnTo>
+                    <a:pt x="4297351" y="2270006"/>
+                  </a:lnTo>
+                  <a:lnTo>
+                    <a:pt x="4368974" y="2368045"/>
+                  </a:lnTo>
+                  <a:lnTo>
+                    <a:pt x="4440596" y="2458164"/>
+                  </a:lnTo>
+                  <a:lnTo>
+                    <a:pt x="4512219" y="2541005"/>
+                  </a:lnTo>
+                  <a:lnTo>
+                    <a:pt x="4583841" y="2617154"/>
+                  </a:lnTo>
+                  <a:lnTo>
+                    <a:pt x="4655464" y="2655705"/>
+                  </a:lnTo>
+                  <a:lnTo>
+                    <a:pt x="4727086" y="2658660"/>
+                  </a:lnTo>
+                  <a:lnTo>
+                    <a:pt x="4798709" y="2661604"/>
+                  </a:lnTo>
+                  <a:lnTo>
+                    <a:pt x="4870331" y="2664537"/>
+                  </a:lnTo>
+                  <a:lnTo>
+                    <a:pt x="4941954" y="2667461"/>
+                  </a:lnTo>
+                  <a:lnTo>
+                    <a:pt x="5013576" y="2670373"/>
+                  </a:lnTo>
+                  <a:lnTo>
+                    <a:pt x="5085199" y="2673276"/>
+                  </a:lnTo>
+                  <a:lnTo>
+                    <a:pt x="5156821" y="2676168"/>
+                  </a:lnTo>
+                  <a:lnTo>
+                    <a:pt x="5228444" y="2679049"/>
+                  </a:lnTo>
+                  <a:lnTo>
+                    <a:pt x="5300066" y="2681921"/>
+                  </a:lnTo>
+                  <a:lnTo>
+                    <a:pt x="5371689" y="2684782"/>
+                  </a:lnTo>
+                  <a:lnTo>
+                    <a:pt x="5443311" y="2687633"/>
+                  </a:lnTo>
+                  <a:lnTo>
+                    <a:pt x="5514934" y="2690473"/>
+                  </a:lnTo>
+                  <a:lnTo>
+                    <a:pt x="5586557" y="2693304"/>
+                  </a:lnTo>
+                  <a:lnTo>
+                    <a:pt x="5658179" y="2696124"/>
+                  </a:lnTo>
+                  <a:lnTo>
+                    <a:pt x="5729802" y="2698935"/>
+                  </a:lnTo>
+                  <a:lnTo>
+                    <a:pt x="5801424" y="2701735"/>
+                  </a:lnTo>
+                  <a:lnTo>
+                    <a:pt x="5873047" y="2704526"/>
+                  </a:lnTo>
+                  <a:lnTo>
+                    <a:pt x="5944669" y="2707306"/>
+                  </a:lnTo>
+                  <a:lnTo>
+                    <a:pt x="6016292" y="2710077"/>
+                  </a:lnTo>
+                  <a:lnTo>
+                    <a:pt x="6087914" y="2712837"/>
+                  </a:lnTo>
+                  <a:lnTo>
+                    <a:pt x="6159537" y="2715588"/>
+                  </a:lnTo>
+                  <a:lnTo>
+                    <a:pt x="6231159" y="2718329"/>
+                  </a:lnTo>
+                  <a:lnTo>
+                    <a:pt x="6302782" y="2721060"/>
+                  </a:lnTo>
+                  <a:lnTo>
+                    <a:pt x="6374404" y="2723782"/>
+                  </a:lnTo>
+                  <a:lnTo>
+                    <a:pt x="6446027" y="2726493"/>
+                  </a:lnTo>
+                  <a:lnTo>
+                    <a:pt x="6517649" y="2729196"/>
+                  </a:lnTo>
+                  <a:lnTo>
+                    <a:pt x="6589272" y="2731888"/>
+                  </a:lnTo>
+                  <a:lnTo>
+                    <a:pt x="6660894" y="2734571"/>
+                  </a:lnTo>
+                  <a:lnTo>
+                    <a:pt x="6732517" y="2737244"/>
+                  </a:lnTo>
+                  <a:lnTo>
+                    <a:pt x="6804139" y="2739908"/>
+                  </a:lnTo>
+                  <a:lnTo>
+                    <a:pt x="6875762" y="2742562"/>
+                  </a:lnTo>
+                  <a:lnTo>
+                    <a:pt x="6947385" y="2745207"/>
+                  </a:lnTo>
+                  <a:lnTo>
+                    <a:pt x="7019007" y="2747842"/>
+                  </a:lnTo>
+                  <a:lnTo>
+                    <a:pt x="7090630" y="2750468"/>
+                  </a:lnTo>
+                  <a:lnTo>
+                    <a:pt x="7090630" y="3438290"/>
+                  </a:lnTo>
+                  <a:lnTo>
+                    <a:pt x="7019007" y="3434295"/>
+                  </a:lnTo>
+                  <a:lnTo>
+                    <a:pt x="6947385" y="3429950"/>
+                  </a:lnTo>
+                  <a:lnTo>
+                    <a:pt x="6875762" y="3425223"/>
+                  </a:lnTo>
+                  <a:lnTo>
+                    <a:pt x="6804139" y="3420080"/>
+                  </a:lnTo>
+                  <a:lnTo>
+                    <a:pt x="6732517" y="3414486"/>
+                  </a:lnTo>
+                  <a:lnTo>
+                    <a:pt x="6660894" y="3408400"/>
+                  </a:lnTo>
+                  <a:lnTo>
+                    <a:pt x="6589272" y="3401779"/>
+                  </a:lnTo>
+                  <a:lnTo>
+                    <a:pt x="6517649" y="3394577"/>
+                  </a:lnTo>
+                  <a:lnTo>
+                    <a:pt x="6446027" y="3386741"/>
+                  </a:lnTo>
+                  <a:lnTo>
+                    <a:pt x="6374404" y="3378217"/>
+                  </a:lnTo>
+                  <a:lnTo>
+                    <a:pt x="6302782" y="3368944"/>
+                  </a:lnTo>
+                  <a:lnTo>
+                    <a:pt x="6231159" y="3358856"/>
+                  </a:lnTo>
+                  <a:lnTo>
+                    <a:pt x="6159537" y="3347882"/>
+                  </a:lnTo>
+                  <a:lnTo>
+                    <a:pt x="6087914" y="3335943"/>
+                  </a:lnTo>
+                  <a:lnTo>
+                    <a:pt x="6016292" y="3322955"/>
+                  </a:lnTo>
+                  <a:lnTo>
+                    <a:pt x="5944669" y="3308826"/>
+                  </a:lnTo>
+                  <a:lnTo>
+                    <a:pt x="5873047" y="3293456"/>
+                  </a:lnTo>
+                  <a:lnTo>
+                    <a:pt x="5801424" y="3276735"/>
+                  </a:lnTo>
+                  <a:lnTo>
+                    <a:pt x="5729802" y="3258544"/>
+                  </a:lnTo>
+                  <a:lnTo>
+                    <a:pt x="5658179" y="3238755"/>
+                  </a:lnTo>
+                  <a:lnTo>
+                    <a:pt x="5586557" y="3217228"/>
+                  </a:lnTo>
+                  <a:lnTo>
+                    <a:pt x="5514934" y="3193808"/>
+                  </a:lnTo>
+                  <a:lnTo>
+                    <a:pt x="5443311" y="3168331"/>
+                  </a:lnTo>
+                  <a:lnTo>
+                    <a:pt x="5371689" y="3140615"/>
+                  </a:lnTo>
+                  <a:lnTo>
+                    <a:pt x="5300066" y="3110463"/>
+                  </a:lnTo>
+                  <a:lnTo>
+                    <a:pt x="5228444" y="3077662"/>
+                  </a:lnTo>
+                  <a:lnTo>
+                    <a:pt x="5156821" y="3041979"/>
+                  </a:lnTo>
+                  <a:lnTo>
+                    <a:pt x="5085199" y="3003160"/>
+                  </a:lnTo>
+                  <a:lnTo>
+                    <a:pt x="5013576" y="2960930"/>
+                  </a:lnTo>
+                  <a:lnTo>
+                    <a:pt x="4941954" y="2914989"/>
+                  </a:lnTo>
+                  <a:lnTo>
+                    <a:pt x="4870331" y="2865012"/>
+                  </a:lnTo>
+                  <a:lnTo>
+                    <a:pt x="4798709" y="2810643"/>
+                  </a:lnTo>
+                  <a:lnTo>
+                    <a:pt x="4727086" y="2751496"/>
+                  </a:lnTo>
+                  <a:lnTo>
+                    <a:pt x="4655464" y="2687152"/>
+                  </a:lnTo>
+                  <a:lnTo>
+                    <a:pt x="4583841" y="2652740"/>
+                  </a:lnTo>
+                  <a:lnTo>
+                    <a:pt x="4512219" y="2649764"/>
+                  </a:lnTo>
+                  <a:lnTo>
+                    <a:pt x="4440596" y="2646777"/>
+                  </a:lnTo>
+                  <a:lnTo>
+                    <a:pt x="4368974" y="2643780"/>
+                  </a:lnTo>
+                  <a:lnTo>
+                    <a:pt x="4297351" y="2640772"/>
+                  </a:lnTo>
+                  <a:lnTo>
+                    <a:pt x="4225729" y="2637754"/>
+                  </a:lnTo>
+                  <a:lnTo>
+                    <a:pt x="4154106" y="2634724"/>
+                  </a:lnTo>
+                  <a:lnTo>
+                    <a:pt x="4082483" y="2631684"/>
+                  </a:lnTo>
+                  <a:lnTo>
+                    <a:pt x="4010861" y="2628632"/>
+                  </a:lnTo>
+                  <a:lnTo>
+                    <a:pt x="3939238" y="2625570"/>
+                  </a:lnTo>
+                  <a:lnTo>
+                    <a:pt x="3867616" y="2622497"/>
+                  </a:lnTo>
+                  <a:lnTo>
+                    <a:pt x="3795993" y="2619413"/>
+                  </a:lnTo>
+                  <a:lnTo>
+                    <a:pt x="3724371" y="2616318"/>
+                  </a:lnTo>
+                  <a:lnTo>
+                    <a:pt x="3652748" y="2613211"/>
+                  </a:lnTo>
+                  <a:lnTo>
+                    <a:pt x="3581126" y="2610094"/>
+                  </a:lnTo>
+                  <a:lnTo>
+                    <a:pt x="3509503" y="2606965"/>
+                  </a:lnTo>
+                  <a:lnTo>
+                    <a:pt x="3437881" y="2603826"/>
+                  </a:lnTo>
+                  <a:lnTo>
+                    <a:pt x="3366258" y="2600675"/>
+                  </a:lnTo>
+                  <a:lnTo>
+                    <a:pt x="3294636" y="2597512"/>
+                  </a:lnTo>
+                  <a:lnTo>
+                    <a:pt x="3223013" y="2594339"/>
+                  </a:lnTo>
+                  <a:lnTo>
+                    <a:pt x="3151391" y="2591154"/>
+                  </a:lnTo>
+                  <a:lnTo>
+                    <a:pt x="3079768" y="2587957"/>
+                  </a:lnTo>
+                  <a:lnTo>
+                    <a:pt x="3008146" y="2584750"/>
+                  </a:lnTo>
+                  <a:lnTo>
+                    <a:pt x="2936523" y="2581530"/>
+                  </a:lnTo>
+                  <a:lnTo>
+                    <a:pt x="2864901" y="2578299"/>
+                  </a:lnTo>
+                  <a:lnTo>
+                    <a:pt x="2793278" y="2575057"/>
+                  </a:lnTo>
+                  <a:lnTo>
+                    <a:pt x="2721655" y="2571803"/>
+                  </a:lnTo>
+                  <a:lnTo>
+                    <a:pt x="2650033" y="2568537"/>
+                  </a:lnTo>
+                  <a:lnTo>
+                    <a:pt x="2578410" y="2565260"/>
+                  </a:lnTo>
+                  <a:lnTo>
+                    <a:pt x="2506788" y="2561971"/>
+                  </a:lnTo>
+                  <a:lnTo>
+                    <a:pt x="2435165" y="2558670"/>
+                  </a:lnTo>
+                  <a:lnTo>
+                    <a:pt x="2363543" y="2555357"/>
+                  </a:lnTo>
+                  <a:lnTo>
+                    <a:pt x="2291920" y="2552032"/>
+                  </a:lnTo>
+                  <a:lnTo>
+                    <a:pt x="2220298" y="2548696"/>
+                  </a:lnTo>
+                  <a:lnTo>
+                    <a:pt x="2148675" y="2545348"/>
+                  </a:lnTo>
+                  <a:lnTo>
+                    <a:pt x="2077053" y="2541987"/>
+                  </a:lnTo>
+                  <a:lnTo>
+                    <a:pt x="2005430" y="2538615"/>
+                  </a:lnTo>
+                  <a:lnTo>
+                    <a:pt x="1933808" y="2535230"/>
+                  </a:lnTo>
+                  <a:lnTo>
+                    <a:pt x="1862185" y="2531833"/>
+                  </a:lnTo>
+                  <a:lnTo>
+                    <a:pt x="1790563" y="2528425"/>
+                  </a:lnTo>
+                  <a:lnTo>
+                    <a:pt x="1718940" y="2525004"/>
+                  </a:lnTo>
+                  <a:lnTo>
+                    <a:pt x="1647318" y="2521570"/>
+                  </a:lnTo>
+                  <a:lnTo>
+                    <a:pt x="1575695" y="2518125"/>
+                  </a:lnTo>
+                  <a:lnTo>
+                    <a:pt x="1504073" y="2514667"/>
+                  </a:lnTo>
+                  <a:lnTo>
+                    <a:pt x="1432450" y="2511196"/>
+                  </a:lnTo>
+                  <a:lnTo>
+                    <a:pt x="1360827" y="2507714"/>
+                  </a:lnTo>
+                  <a:lnTo>
+                    <a:pt x="1289205" y="2504219"/>
+                  </a:lnTo>
+                  <a:lnTo>
+                    <a:pt x="1217582" y="2500711"/>
+                  </a:lnTo>
+                  <a:lnTo>
+                    <a:pt x="1145960" y="2497191"/>
+                  </a:lnTo>
+                  <a:lnTo>
+                    <a:pt x="1074337" y="2493658"/>
+                  </a:lnTo>
+                  <a:lnTo>
+                    <a:pt x="1002715" y="2490112"/>
+                  </a:lnTo>
+                  <a:lnTo>
+                    <a:pt x="931092" y="2486554"/>
+                  </a:lnTo>
+                  <a:lnTo>
+                    <a:pt x="859470" y="2482983"/>
+                  </a:lnTo>
+                  <a:lnTo>
+                    <a:pt x="787847" y="2479399"/>
+                  </a:lnTo>
+                  <a:lnTo>
+                    <a:pt x="716225" y="2475803"/>
+                  </a:lnTo>
+                  <a:lnTo>
+                    <a:pt x="644602" y="2472193"/>
+                  </a:lnTo>
+                  <a:lnTo>
+                    <a:pt x="572980" y="2468571"/>
+                  </a:lnTo>
+                  <a:lnTo>
+                    <a:pt x="501357" y="2464935"/>
+                  </a:lnTo>
+                  <a:lnTo>
+                    <a:pt x="429735" y="2461287"/>
+                  </a:lnTo>
+                  <a:lnTo>
+                    <a:pt x="358112" y="2457625"/>
+                  </a:lnTo>
+                  <a:lnTo>
+                    <a:pt x="286490" y="2453951"/>
+                  </a:lnTo>
+                  <a:lnTo>
+                    <a:pt x="214867" y="2450263"/>
+                  </a:lnTo>
+                  <a:lnTo>
+                    <a:pt x="143245" y="2446562"/>
+                  </a:lnTo>
+                  <a:lnTo>
+                    <a:pt x="71622" y="2442848"/>
+                  </a:lnTo>
+                  <a:lnTo>
+                    <a:pt x="0" y="2439121"/>
                   </a:lnTo>
                   <a:lnTo>
                     <a:pt x="0" y="0"/>
@@ -3412,174 +3409,171 @@
           </p:nvSpPr>
           <p:spPr>
             <a:xfrm>
-              <a:off x="4526737" y="2073503"/>
-              <a:ext cx="3735942" cy="2735642"/>
+              <a:off x="4573501" y="2073503"/>
+              <a:ext cx="3689177" cy="2750468"/>
             </a:xfrm>
             <a:custGeom>
               <a:avLst/>
               <a:pathLst>
-                <a:path w="3735942" h="2735642">
+                <a:path w="3689177" h="2750468">
                   <a:moveTo>
                     <a:pt x="0" y="0"/>
                   </a:moveTo>
                   <a:lnTo>
-                    <a:pt x="11570" y="47286"/>
-                  </a:lnTo>
-                  <a:lnTo>
-                    <a:pt x="83193" y="317008"/>
-                  </a:lnTo>
-                  <a:lnTo>
-                    <a:pt x="154816" y="565561"/>
-                  </a:lnTo>
-                  <a:lnTo>
-                    <a:pt x="226438" y="794604"/>
-                  </a:lnTo>
-                  <a:lnTo>
-                    <a:pt x="298061" y="1005671"/>
-                  </a:lnTo>
-                  <a:lnTo>
-                    <a:pt x="369683" y="1200171"/>
-                  </a:lnTo>
-                  <a:lnTo>
-                    <a:pt x="441306" y="1379405"/>
-                  </a:lnTo>
-                  <a:lnTo>
-                    <a:pt x="512928" y="1544572"/>
-                  </a:lnTo>
-                  <a:lnTo>
-                    <a:pt x="584551" y="1696774"/>
-                  </a:lnTo>
-                  <a:lnTo>
-                    <a:pt x="656173" y="1837031"/>
-                  </a:lnTo>
-                  <a:lnTo>
-                    <a:pt x="727796" y="1966279"/>
-                  </a:lnTo>
-                  <a:lnTo>
-                    <a:pt x="799418" y="2085383"/>
-                  </a:lnTo>
-                  <a:lnTo>
-                    <a:pt x="871041" y="2195138"/>
-                  </a:lnTo>
-                  <a:lnTo>
-                    <a:pt x="942663" y="2296279"/>
-                  </a:lnTo>
-                  <a:lnTo>
-                    <a:pt x="1014286" y="2389481"/>
-                  </a:lnTo>
-                  <a:lnTo>
-                    <a:pt x="1085908" y="2475369"/>
-                  </a:lnTo>
-                  <a:lnTo>
-                    <a:pt x="1157531" y="2554515"/>
-                  </a:lnTo>
-                  <a:lnTo>
-                    <a:pt x="1229153" y="2627448"/>
-                  </a:lnTo>
-                  <a:lnTo>
-                    <a:pt x="1300776" y="2655792"/>
-                  </a:lnTo>
-                  <a:lnTo>
-                    <a:pt x="1372398" y="2658258"/>
-                  </a:lnTo>
-                  <a:lnTo>
-                    <a:pt x="1444021" y="2660716"/>
-                  </a:lnTo>
-                  <a:lnTo>
-                    <a:pt x="1515644" y="2663168"/>
-                  </a:lnTo>
-                  <a:lnTo>
-                    <a:pt x="1587266" y="2665612"/>
-                  </a:lnTo>
-                  <a:lnTo>
-                    <a:pt x="1658889" y="2668049"/>
-                  </a:lnTo>
-                  <a:lnTo>
-                    <a:pt x="1730511" y="2670478"/>
-                  </a:lnTo>
-                  <a:lnTo>
-                    <a:pt x="1802134" y="2672900"/>
-                  </a:lnTo>
-                  <a:lnTo>
-                    <a:pt x="1873756" y="2675315"/>
-                  </a:lnTo>
-                  <a:lnTo>
-                    <a:pt x="1945379" y="2677723"/>
-                  </a:lnTo>
-                  <a:lnTo>
-                    <a:pt x="2017001" y="2680124"/>
-                  </a:lnTo>
-                  <a:lnTo>
-                    <a:pt x="2088624" y="2682517"/>
-                  </a:lnTo>
-                  <a:lnTo>
-                    <a:pt x="2160246" y="2684904"/>
-                  </a:lnTo>
-                  <a:lnTo>
-                    <a:pt x="2231869" y="2687283"/>
-                  </a:lnTo>
-                  <a:lnTo>
-                    <a:pt x="2303491" y="2689655"/>
-                  </a:lnTo>
-                  <a:lnTo>
-                    <a:pt x="2375114" y="2692020"/>
-                  </a:lnTo>
-                  <a:lnTo>
-                    <a:pt x="2446736" y="2694378"/>
-                  </a:lnTo>
-                  <a:lnTo>
-                    <a:pt x="2518359" y="2696729"/>
-                  </a:lnTo>
-                  <a:lnTo>
-                    <a:pt x="2589981" y="2699073"/>
-                  </a:lnTo>
-                  <a:lnTo>
-                    <a:pt x="2661604" y="2701410"/>
-                  </a:lnTo>
-                  <a:lnTo>
-                    <a:pt x="2733226" y="2703740"/>
-                  </a:lnTo>
-                  <a:lnTo>
-                    <a:pt x="2804849" y="2706064"/>
-                  </a:lnTo>
-                  <a:lnTo>
-                    <a:pt x="2876472" y="2708380"/>
-                  </a:lnTo>
-                  <a:lnTo>
-                    <a:pt x="2948094" y="2710689"/>
-                  </a:lnTo>
-                  <a:lnTo>
-                    <a:pt x="3019717" y="2712992"/>
-                  </a:lnTo>
-                  <a:lnTo>
-                    <a:pt x="3091339" y="2715287"/>
-                  </a:lnTo>
-                  <a:lnTo>
-                    <a:pt x="3162962" y="2717576"/>
-                  </a:lnTo>
-                  <a:lnTo>
-                    <a:pt x="3234584" y="2719858"/>
-                  </a:lnTo>
-                  <a:lnTo>
-                    <a:pt x="3306207" y="2722133"/>
-                  </a:lnTo>
-                  <a:lnTo>
-                    <a:pt x="3377829" y="2724401"/>
-                  </a:lnTo>
-                  <a:lnTo>
-                    <a:pt x="3449452" y="2726663"/>
-                  </a:lnTo>
-                  <a:lnTo>
-                    <a:pt x="3521074" y="2728918"/>
-                  </a:lnTo>
-                  <a:lnTo>
-                    <a:pt x="3592697" y="2731166"/>
-                  </a:lnTo>
-                  <a:lnTo>
-                    <a:pt x="3664319" y="2733408"/>
-                  </a:lnTo>
-                  <a:lnTo>
-                    <a:pt x="3735942" y="2735642"/>
+                    <a:pt x="36428" y="149039"/>
+                  </a:lnTo>
+                  <a:lnTo>
+                    <a:pt x="108051" y="418397"/>
+                  </a:lnTo>
+                  <a:lnTo>
+                    <a:pt x="179673" y="665997"/>
+                  </a:lnTo>
+                  <a:lnTo>
+                    <a:pt x="251296" y="893598"/>
+                  </a:lnTo>
+                  <a:lnTo>
+                    <a:pt x="322918" y="1102814"/>
+                  </a:lnTo>
+                  <a:lnTo>
+                    <a:pt x="394541" y="1295131"/>
+                  </a:lnTo>
+                  <a:lnTo>
+                    <a:pt x="466163" y="1471914"/>
+                  </a:lnTo>
+                  <a:lnTo>
+                    <a:pt x="537786" y="1634418"/>
+                  </a:lnTo>
+                  <a:lnTo>
+                    <a:pt x="609409" y="1783795"/>
+                  </a:lnTo>
+                  <a:lnTo>
+                    <a:pt x="681031" y="1921107"/>
+                  </a:lnTo>
+                  <a:lnTo>
+                    <a:pt x="752654" y="2047328"/>
+                  </a:lnTo>
+                  <a:lnTo>
+                    <a:pt x="824276" y="2163353"/>
+                  </a:lnTo>
+                  <a:lnTo>
+                    <a:pt x="895899" y="2270006"/>
+                  </a:lnTo>
+                  <a:lnTo>
+                    <a:pt x="967521" y="2368045"/>
+                  </a:lnTo>
+                  <a:lnTo>
+                    <a:pt x="1039144" y="2458164"/>
+                  </a:lnTo>
+                  <a:lnTo>
+                    <a:pt x="1110766" y="2541005"/>
+                  </a:lnTo>
+                  <a:lnTo>
+                    <a:pt x="1182389" y="2617154"/>
+                  </a:lnTo>
+                  <a:lnTo>
+                    <a:pt x="1254011" y="2655705"/>
+                  </a:lnTo>
+                  <a:lnTo>
+                    <a:pt x="1325634" y="2658660"/>
+                  </a:lnTo>
+                  <a:lnTo>
+                    <a:pt x="1397256" y="2661604"/>
+                  </a:lnTo>
+                  <a:lnTo>
+                    <a:pt x="1468879" y="2664537"/>
+                  </a:lnTo>
+                  <a:lnTo>
+                    <a:pt x="1540501" y="2667461"/>
+                  </a:lnTo>
+                  <a:lnTo>
+                    <a:pt x="1612124" y="2670373"/>
+                  </a:lnTo>
+                  <a:lnTo>
+                    <a:pt x="1683746" y="2673276"/>
+                  </a:lnTo>
+                  <a:lnTo>
+                    <a:pt x="1755369" y="2676168"/>
+                  </a:lnTo>
+                  <a:lnTo>
+                    <a:pt x="1826991" y="2679049"/>
+                  </a:lnTo>
+                  <a:lnTo>
+                    <a:pt x="1898614" y="2681921"/>
+                  </a:lnTo>
+                  <a:lnTo>
+                    <a:pt x="1970237" y="2684782"/>
+                  </a:lnTo>
+                  <a:lnTo>
+                    <a:pt x="2041859" y="2687633"/>
+                  </a:lnTo>
+                  <a:lnTo>
+                    <a:pt x="2113482" y="2690473"/>
+                  </a:lnTo>
+                  <a:lnTo>
+                    <a:pt x="2185104" y="2693304"/>
+                  </a:lnTo>
+                  <a:lnTo>
+                    <a:pt x="2256727" y="2696124"/>
+                  </a:lnTo>
+                  <a:lnTo>
+                    <a:pt x="2328349" y="2698935"/>
+                  </a:lnTo>
+                  <a:lnTo>
+                    <a:pt x="2399972" y="2701735"/>
+                  </a:lnTo>
+                  <a:lnTo>
+                    <a:pt x="2471594" y="2704526"/>
+                  </a:lnTo>
+                  <a:lnTo>
+                    <a:pt x="2543217" y="2707306"/>
+                  </a:lnTo>
+                  <a:lnTo>
+                    <a:pt x="2614839" y="2710077"/>
+                  </a:lnTo>
+                  <a:lnTo>
+                    <a:pt x="2686462" y="2712837"/>
+                  </a:lnTo>
+                  <a:lnTo>
+                    <a:pt x="2758084" y="2715588"/>
+                  </a:lnTo>
+                  <a:lnTo>
+                    <a:pt x="2829707" y="2718329"/>
+                  </a:lnTo>
+                  <a:lnTo>
+                    <a:pt x="2901329" y="2721060"/>
+                  </a:lnTo>
+                  <a:lnTo>
+                    <a:pt x="2972952" y="2723782"/>
+                  </a:lnTo>
+                  <a:lnTo>
+                    <a:pt x="3044574" y="2726493"/>
+                  </a:lnTo>
+                  <a:lnTo>
+                    <a:pt x="3116197" y="2729196"/>
+                  </a:lnTo>
+                  <a:lnTo>
+                    <a:pt x="3187819" y="2731888"/>
+                  </a:lnTo>
+                  <a:lnTo>
+                    <a:pt x="3259442" y="2734571"/>
+                  </a:lnTo>
+                  <a:lnTo>
+                    <a:pt x="3331065" y="2737244"/>
+                  </a:lnTo>
+                  <a:lnTo>
+                    <a:pt x="3402687" y="2739908"/>
+                  </a:lnTo>
+                  <a:lnTo>
+                    <a:pt x="3474310" y="2742562"/>
+                  </a:lnTo>
+                  <a:lnTo>
+                    <a:pt x="3545932" y="2745207"/>
+                  </a:lnTo>
+                  <a:lnTo>
+                    <a:pt x="3617555" y="2747842"/>
+                  </a:lnTo>
+                  <a:lnTo>
+                    <a:pt x="3689177" y="2750468"/>
                   </a:lnTo>
                 </a:path>
               </a:pathLst>
@@ -3599,309 +3593,309 @@
           </p:nvSpPr>
           <p:spPr>
             <a:xfrm>
-              <a:off x="1172049" y="4552150"/>
-              <a:ext cx="7090630" cy="956104"/>
+              <a:off x="1172049" y="4512624"/>
+              <a:ext cx="7090630" cy="999169"/>
             </a:xfrm>
             <a:custGeom>
               <a:avLst/>
               <a:pathLst>
-                <a:path w="7090630" h="956104">
+                <a:path w="7090630" h="999169">
                   <a:moveTo>
-                    <a:pt x="7090630" y="956104"/>
+                    <a:pt x="7090630" y="999169"/>
                   </a:moveTo>
                   <a:lnTo>
-                    <a:pt x="7019007" y="951931"/>
-                  </a:lnTo>
-                  <a:lnTo>
-                    <a:pt x="6947385" y="947402"/>
-                  </a:lnTo>
-                  <a:lnTo>
-                    <a:pt x="6875762" y="942488"/>
-                  </a:lnTo>
-                  <a:lnTo>
-                    <a:pt x="6804139" y="937155"/>
-                  </a:lnTo>
-                  <a:lnTo>
-                    <a:pt x="6732517" y="931368"/>
-                  </a:lnTo>
-                  <a:lnTo>
-                    <a:pt x="6660894" y="925088"/>
-                  </a:lnTo>
-                  <a:lnTo>
-                    <a:pt x="6589272" y="918274"/>
-                  </a:lnTo>
-                  <a:lnTo>
-                    <a:pt x="6517649" y="910878"/>
-                  </a:lnTo>
-                  <a:lnTo>
-                    <a:pt x="6446027" y="902853"/>
-                  </a:lnTo>
-                  <a:lnTo>
-                    <a:pt x="6374404" y="894145"/>
-                  </a:lnTo>
-                  <a:lnTo>
-                    <a:pt x="6302782" y="884694"/>
-                  </a:lnTo>
-                  <a:lnTo>
-                    <a:pt x="6231159" y="874439"/>
-                  </a:lnTo>
-                  <a:lnTo>
-                    <a:pt x="6159537" y="863310"/>
-                  </a:lnTo>
-                  <a:lnTo>
-                    <a:pt x="6087914" y="851233"/>
-                  </a:lnTo>
-                  <a:lnTo>
-                    <a:pt x="6016292" y="838128"/>
-                  </a:lnTo>
-                  <a:lnTo>
-                    <a:pt x="5944669" y="823907"/>
-                  </a:lnTo>
-                  <a:lnTo>
-                    <a:pt x="5873047" y="808474"/>
-                  </a:lnTo>
-                  <a:lnTo>
-                    <a:pt x="5801424" y="791727"/>
-                  </a:lnTo>
-                  <a:lnTo>
-                    <a:pt x="5729802" y="773553"/>
-                  </a:lnTo>
-                  <a:lnTo>
-                    <a:pt x="5658179" y="753831"/>
-                  </a:lnTo>
-                  <a:lnTo>
-                    <a:pt x="5586557" y="732430"/>
-                  </a:lnTo>
-                  <a:lnTo>
-                    <a:pt x="5514934" y="709206"/>
-                  </a:lnTo>
-                  <a:lnTo>
-                    <a:pt x="5443311" y="684003"/>
-                  </a:lnTo>
-                  <a:lnTo>
-                    <a:pt x="5371689" y="656655"/>
-                  </a:lnTo>
-                  <a:lnTo>
-                    <a:pt x="5300066" y="626976"/>
-                  </a:lnTo>
-                  <a:lnTo>
-                    <a:pt x="5228444" y="594770"/>
-                  </a:lnTo>
-                  <a:lnTo>
-                    <a:pt x="5156821" y="559821"/>
-                  </a:lnTo>
-                  <a:lnTo>
-                    <a:pt x="5085199" y="521895"/>
-                  </a:lnTo>
-                  <a:lnTo>
-                    <a:pt x="5013576" y="480739"/>
-                  </a:lnTo>
-                  <a:lnTo>
-                    <a:pt x="4941954" y="436077"/>
-                  </a:lnTo>
-                  <a:lnTo>
-                    <a:pt x="4870331" y="387612"/>
-                  </a:lnTo>
-                  <a:lnTo>
-                    <a:pt x="4798709" y="335018"/>
-                  </a:lnTo>
-                  <a:lnTo>
-                    <a:pt x="4727086" y="277945"/>
-                  </a:lnTo>
-                  <a:lnTo>
-                    <a:pt x="4655464" y="216011"/>
-                  </a:lnTo>
-                  <a:lnTo>
-                    <a:pt x="4583841" y="174671"/>
-                  </a:lnTo>
-                  <a:lnTo>
-                    <a:pt x="4512219" y="172191"/>
-                  </a:lnTo>
-                  <a:lnTo>
-                    <a:pt x="4440596" y="169702"/>
-                  </a:lnTo>
-                  <a:lnTo>
-                    <a:pt x="4368974" y="167207"/>
-                  </a:lnTo>
-                  <a:lnTo>
-                    <a:pt x="4297351" y="164704"/>
-                  </a:lnTo>
-                  <a:lnTo>
-                    <a:pt x="4225729" y="162193"/>
-                  </a:lnTo>
-                  <a:lnTo>
-                    <a:pt x="4154106" y="159675"/>
-                  </a:lnTo>
-                  <a:lnTo>
-                    <a:pt x="4082483" y="157150"/>
-                  </a:lnTo>
-                  <a:lnTo>
-                    <a:pt x="4010861" y="154617"/>
-                  </a:lnTo>
-                  <a:lnTo>
-                    <a:pt x="3939238" y="152076"/>
-                  </a:lnTo>
-                  <a:lnTo>
-                    <a:pt x="3867616" y="149528"/>
-                  </a:lnTo>
-                  <a:lnTo>
-                    <a:pt x="3795993" y="146972"/>
-                  </a:lnTo>
-                  <a:lnTo>
-                    <a:pt x="3724371" y="144409"/>
-                  </a:lnTo>
-                  <a:lnTo>
-                    <a:pt x="3652748" y="141838"/>
-                  </a:lnTo>
-                  <a:lnTo>
-                    <a:pt x="3581126" y="139259"/>
-                  </a:lnTo>
-                  <a:lnTo>
-                    <a:pt x="3509503" y="136672"/>
-                  </a:lnTo>
-                  <a:lnTo>
-                    <a:pt x="3437881" y="134078"/>
-                  </a:lnTo>
-                  <a:lnTo>
-                    <a:pt x="3366258" y="131476"/>
-                  </a:lnTo>
-                  <a:lnTo>
-                    <a:pt x="3294636" y="128866"/>
-                  </a:lnTo>
-                  <a:lnTo>
-                    <a:pt x="3223013" y="126249"/>
-                  </a:lnTo>
-                  <a:lnTo>
-                    <a:pt x="3151391" y="123623"/>
-                  </a:lnTo>
-                  <a:lnTo>
-                    <a:pt x="3079768" y="120990"/>
-                  </a:lnTo>
-                  <a:lnTo>
-                    <a:pt x="3008146" y="118349"/>
-                  </a:lnTo>
-                  <a:lnTo>
-                    <a:pt x="2936523" y="115700"/>
-                  </a:lnTo>
-                  <a:lnTo>
-                    <a:pt x="2864901" y="113043"/>
-                  </a:lnTo>
-                  <a:lnTo>
-                    <a:pt x="2793278" y="110378"/>
-                  </a:lnTo>
-                  <a:lnTo>
-                    <a:pt x="2721655" y="107706"/>
-                  </a:lnTo>
-                  <a:lnTo>
-                    <a:pt x="2650033" y="105025"/>
-                  </a:lnTo>
-                  <a:lnTo>
-                    <a:pt x="2578410" y="102336"/>
-                  </a:lnTo>
-                  <a:lnTo>
-                    <a:pt x="2506788" y="99639"/>
-                  </a:lnTo>
-                  <a:lnTo>
-                    <a:pt x="2435165" y="96934"/>
-                  </a:lnTo>
-                  <a:lnTo>
-                    <a:pt x="2363543" y="94221"/>
-                  </a:lnTo>
-                  <a:lnTo>
-                    <a:pt x="2291920" y="91500"/>
-                  </a:lnTo>
-                  <a:lnTo>
-                    <a:pt x="2220298" y="88771"/>
-                  </a:lnTo>
-                  <a:lnTo>
-                    <a:pt x="2148675" y="86034"/>
-                  </a:lnTo>
-                  <a:lnTo>
-                    <a:pt x="2077053" y="83288"/>
-                  </a:lnTo>
-                  <a:lnTo>
-                    <a:pt x="2005430" y="80535"/>
-                  </a:lnTo>
-                  <a:lnTo>
-                    <a:pt x="1933808" y="77773"/>
-                  </a:lnTo>
-                  <a:lnTo>
-                    <a:pt x="1862185" y="75003"/>
-                  </a:lnTo>
-                  <a:lnTo>
-                    <a:pt x="1790563" y="72224"/>
-                  </a:lnTo>
-                  <a:lnTo>
-                    <a:pt x="1718940" y="69437"/>
-                  </a:lnTo>
-                  <a:lnTo>
-                    <a:pt x="1647318" y="66642"/>
-                  </a:lnTo>
-                  <a:lnTo>
-                    <a:pt x="1575695" y="63839"/>
-                  </a:lnTo>
-                  <a:lnTo>
-                    <a:pt x="1504073" y="61027"/>
-                  </a:lnTo>
-                  <a:lnTo>
-                    <a:pt x="1432450" y="58207"/>
-                  </a:lnTo>
-                  <a:lnTo>
-                    <a:pt x="1360827" y="55378"/>
-                  </a:lnTo>
-                  <a:lnTo>
-                    <a:pt x="1289205" y="52541"/>
-                  </a:lnTo>
-                  <a:lnTo>
-                    <a:pt x="1217582" y="49695"/>
-                  </a:lnTo>
-                  <a:lnTo>
-                    <a:pt x="1145960" y="46841"/>
-                  </a:lnTo>
-                  <a:lnTo>
-                    <a:pt x="1074337" y="43979"/>
-                  </a:lnTo>
-                  <a:lnTo>
-                    <a:pt x="1002715" y="41108"/>
-                  </a:lnTo>
-                  <a:lnTo>
-                    <a:pt x="931092" y="38228"/>
-                  </a:lnTo>
-                  <a:lnTo>
-                    <a:pt x="859470" y="35340"/>
-                  </a:lnTo>
-                  <a:lnTo>
-                    <a:pt x="787847" y="32443"/>
-                  </a:lnTo>
-                  <a:lnTo>
-                    <a:pt x="716225" y="29537"/>
-                  </a:lnTo>
-                  <a:lnTo>
-                    <a:pt x="644602" y="26623"/>
-                  </a:lnTo>
-                  <a:lnTo>
-                    <a:pt x="572980" y="23700"/>
-                  </a:lnTo>
-                  <a:lnTo>
-                    <a:pt x="501357" y="20768"/>
-                  </a:lnTo>
-                  <a:lnTo>
-                    <a:pt x="429735" y="17828"/>
-                  </a:lnTo>
-                  <a:lnTo>
-                    <a:pt x="358112" y="14878"/>
-                  </a:lnTo>
-                  <a:lnTo>
-                    <a:pt x="286490" y="11920"/>
-                  </a:lnTo>
-                  <a:lnTo>
-                    <a:pt x="214867" y="8953"/>
-                  </a:lnTo>
-                  <a:lnTo>
-                    <a:pt x="143245" y="5978"/>
-                  </a:lnTo>
-                  <a:lnTo>
-                    <a:pt x="71622" y="2993"/>
+                    <a:pt x="7019007" y="995174"/>
+                  </a:lnTo>
+                  <a:lnTo>
+                    <a:pt x="6947385" y="990829"/>
+                  </a:lnTo>
+                  <a:lnTo>
+                    <a:pt x="6875762" y="986102"/>
+                  </a:lnTo>
+                  <a:lnTo>
+                    <a:pt x="6804139" y="980959"/>
+                  </a:lnTo>
+                  <a:lnTo>
+                    <a:pt x="6732517" y="975365"/>
+                  </a:lnTo>
+                  <a:lnTo>
+                    <a:pt x="6660894" y="969279"/>
+                  </a:lnTo>
+                  <a:lnTo>
+                    <a:pt x="6589272" y="962658"/>
+                  </a:lnTo>
+                  <a:lnTo>
+                    <a:pt x="6517649" y="955455"/>
+                  </a:lnTo>
+                  <a:lnTo>
+                    <a:pt x="6446027" y="947620"/>
+                  </a:lnTo>
+                  <a:lnTo>
+                    <a:pt x="6374404" y="939096"/>
+                  </a:lnTo>
+                  <a:lnTo>
+                    <a:pt x="6302782" y="929823"/>
+                  </a:lnTo>
+                  <a:lnTo>
+                    <a:pt x="6231159" y="919735"/>
+                  </a:lnTo>
+                  <a:lnTo>
+                    <a:pt x="6159537" y="908761"/>
+                  </a:lnTo>
+                  <a:lnTo>
+                    <a:pt x="6087914" y="896822"/>
+                  </a:lnTo>
+                  <a:lnTo>
+                    <a:pt x="6016292" y="883834"/>
+                  </a:lnTo>
+                  <a:lnTo>
+                    <a:pt x="5944669" y="869705"/>
+                  </a:lnTo>
+                  <a:lnTo>
+                    <a:pt x="5873047" y="854335"/>
+                  </a:lnTo>
+                  <a:lnTo>
+                    <a:pt x="5801424" y="837614"/>
+                  </a:lnTo>
+                  <a:lnTo>
+                    <a:pt x="5729802" y="819423"/>
+                  </a:lnTo>
+                  <a:lnTo>
+                    <a:pt x="5658179" y="799634"/>
+                  </a:lnTo>
+                  <a:lnTo>
+                    <a:pt x="5586557" y="778107"/>
+                  </a:lnTo>
+                  <a:lnTo>
+                    <a:pt x="5514934" y="754687"/>
+                  </a:lnTo>
+                  <a:lnTo>
+                    <a:pt x="5443311" y="729210"/>
+                  </a:lnTo>
+                  <a:lnTo>
+                    <a:pt x="5371689" y="701494"/>
+                  </a:lnTo>
+                  <a:lnTo>
+                    <a:pt x="5300066" y="671342"/>
+                  </a:lnTo>
+                  <a:lnTo>
+                    <a:pt x="5228444" y="638541"/>
+                  </a:lnTo>
+                  <a:lnTo>
+                    <a:pt x="5156821" y="602858"/>
+                  </a:lnTo>
+                  <a:lnTo>
+                    <a:pt x="5085199" y="564039"/>
+                  </a:lnTo>
+                  <a:lnTo>
+                    <a:pt x="5013576" y="521809"/>
+                  </a:lnTo>
+                  <a:lnTo>
+                    <a:pt x="4941954" y="475868"/>
+                  </a:lnTo>
+                  <a:lnTo>
+                    <a:pt x="4870331" y="425891"/>
+                  </a:lnTo>
+                  <a:lnTo>
+                    <a:pt x="4798709" y="371521"/>
+                  </a:lnTo>
+                  <a:lnTo>
+                    <a:pt x="4727086" y="312375"/>
+                  </a:lnTo>
+                  <a:lnTo>
+                    <a:pt x="4655464" y="248031"/>
+                  </a:lnTo>
+                  <a:lnTo>
+                    <a:pt x="4583841" y="213619"/>
+                  </a:lnTo>
+                  <a:lnTo>
+                    <a:pt x="4512219" y="210643"/>
+                  </a:lnTo>
+                  <a:lnTo>
+                    <a:pt x="4440596" y="207656"/>
+                  </a:lnTo>
+                  <a:lnTo>
+                    <a:pt x="4368974" y="204659"/>
+                  </a:lnTo>
+                  <a:lnTo>
+                    <a:pt x="4297351" y="201651"/>
+                  </a:lnTo>
+                  <a:lnTo>
+                    <a:pt x="4225729" y="198632"/>
+                  </a:lnTo>
+                  <a:lnTo>
+                    <a:pt x="4154106" y="195603"/>
+                  </a:lnTo>
+                  <a:lnTo>
+                    <a:pt x="4082483" y="192563"/>
+                  </a:lnTo>
+                  <a:lnTo>
+                    <a:pt x="4010861" y="189511"/>
+                  </a:lnTo>
+                  <a:lnTo>
+                    <a:pt x="3939238" y="186449"/>
+                  </a:lnTo>
+                  <a:lnTo>
+                    <a:pt x="3867616" y="183376"/>
+                  </a:lnTo>
+                  <a:lnTo>
+                    <a:pt x="3795993" y="180292"/>
+                  </a:lnTo>
+                  <a:lnTo>
+                    <a:pt x="3724371" y="177197"/>
+                  </a:lnTo>
+                  <a:lnTo>
+                    <a:pt x="3652748" y="174090"/>
+                  </a:lnTo>
+                  <a:lnTo>
+                    <a:pt x="3581126" y="170973"/>
+                  </a:lnTo>
+                  <a:lnTo>
+                    <a:pt x="3509503" y="167844"/>
+                  </a:lnTo>
+                  <a:lnTo>
+                    <a:pt x="3437881" y="164705"/>
+                  </a:lnTo>
+                  <a:lnTo>
+                    <a:pt x="3366258" y="161554"/>
+                  </a:lnTo>
+                  <a:lnTo>
+                    <a:pt x="3294636" y="158391"/>
+                  </a:lnTo>
+                  <a:lnTo>
+                    <a:pt x="3223013" y="155218"/>
+                  </a:lnTo>
+                  <a:lnTo>
+                    <a:pt x="3151391" y="152033"/>
+                  </a:lnTo>
+                  <a:lnTo>
+                    <a:pt x="3079768" y="148836"/>
+                  </a:lnTo>
+                  <a:lnTo>
+                    <a:pt x="3008146" y="145628"/>
+                  </a:lnTo>
+                  <a:lnTo>
+                    <a:pt x="2936523" y="142409"/>
+                  </a:lnTo>
+                  <a:lnTo>
+                    <a:pt x="2864901" y="139178"/>
+                  </a:lnTo>
+                  <a:lnTo>
+                    <a:pt x="2793278" y="135936"/>
+                  </a:lnTo>
+                  <a:lnTo>
+                    <a:pt x="2721655" y="132682"/>
+                  </a:lnTo>
+                  <a:lnTo>
+                    <a:pt x="2650033" y="129416"/>
+                  </a:lnTo>
+                  <a:lnTo>
+                    <a:pt x="2578410" y="126139"/>
+                  </a:lnTo>
+                  <a:lnTo>
+                    <a:pt x="2506788" y="122850"/>
+                  </a:lnTo>
+                  <a:lnTo>
+                    <a:pt x="2435165" y="119549"/>
+                  </a:lnTo>
+                  <a:lnTo>
+                    <a:pt x="2363543" y="116236"/>
+                  </a:lnTo>
+                  <a:lnTo>
+                    <a:pt x="2291920" y="112911"/>
+                  </a:lnTo>
+                  <a:lnTo>
+                    <a:pt x="2220298" y="109575"/>
+                  </a:lnTo>
+                  <a:lnTo>
+                    <a:pt x="2148675" y="106226"/>
+                  </a:lnTo>
+                  <a:lnTo>
+                    <a:pt x="2077053" y="102866"/>
+                  </a:lnTo>
+                  <a:lnTo>
+                    <a:pt x="2005430" y="99494"/>
+                  </a:lnTo>
+                  <a:lnTo>
+                    <a:pt x="1933808" y="96109"/>
+                  </a:lnTo>
+                  <a:lnTo>
+                    <a:pt x="1862185" y="92712"/>
+                  </a:lnTo>
+                  <a:lnTo>
+                    <a:pt x="1790563" y="89303"/>
+                  </a:lnTo>
+                  <a:lnTo>
+                    <a:pt x="1718940" y="85882"/>
+                  </a:lnTo>
+                  <a:lnTo>
+                    <a:pt x="1647318" y="82449"/>
+                  </a:lnTo>
+                  <a:lnTo>
+                    <a:pt x="1575695" y="79004"/>
+                  </a:lnTo>
+                  <a:lnTo>
+                    <a:pt x="1504073" y="75546"/>
+                  </a:lnTo>
+                  <a:lnTo>
+                    <a:pt x="1432450" y="72075"/>
+                  </a:lnTo>
+                  <a:lnTo>
+                    <a:pt x="1360827" y="68593"/>
+                  </a:lnTo>
+                  <a:lnTo>
+                    <a:pt x="1289205" y="65097"/>
+                  </a:lnTo>
+                  <a:lnTo>
+                    <a:pt x="1217582" y="61590"/>
+                  </a:lnTo>
+                  <a:lnTo>
+                    <a:pt x="1145960" y="58069"/>
+                  </a:lnTo>
+                  <a:lnTo>
+                    <a:pt x="1074337" y="54537"/>
+                  </a:lnTo>
+                  <a:lnTo>
+                    <a:pt x="1002715" y="50991"/>
+                  </a:lnTo>
+                  <a:lnTo>
+                    <a:pt x="931092" y="47433"/>
+                  </a:lnTo>
+                  <a:lnTo>
+                    <a:pt x="859470" y="43862"/>
+                  </a:lnTo>
+                  <a:lnTo>
+                    <a:pt x="787847" y="40278"/>
+                  </a:lnTo>
+                  <a:lnTo>
+                    <a:pt x="716225" y="36681"/>
+                  </a:lnTo>
+                  <a:lnTo>
+                    <a:pt x="644602" y="33072"/>
+                  </a:lnTo>
+                  <a:lnTo>
+                    <a:pt x="572980" y="29450"/>
+                  </a:lnTo>
+                  <a:lnTo>
+                    <a:pt x="501357" y="25814"/>
+                  </a:lnTo>
+                  <a:lnTo>
+                    <a:pt x="429735" y="22166"/>
+                  </a:lnTo>
+                  <a:lnTo>
+                    <a:pt x="358112" y="18504"/>
+                  </a:lnTo>
+                  <a:lnTo>
+                    <a:pt x="286490" y="14830"/>
+                  </a:lnTo>
+                  <a:lnTo>
+                    <a:pt x="214867" y="11142"/>
+                  </a:lnTo>
+                  <a:lnTo>
+                    <a:pt x="143245" y="7441"/>
+                  </a:lnTo>
+                  <a:lnTo>
+                    <a:pt x="71622" y="3727"/>
                   </a:lnTo>
                   <a:lnTo>
                     <a:pt x="0" y="0"/>
@@ -3924,222 +3918,219 @@
           </p:nvSpPr>
           <p:spPr>
             <a:xfrm>
-              <a:off x="3357798" y="2073503"/>
-              <a:ext cx="4904881" cy="3292296"/>
+              <a:off x="3451963" y="2073503"/>
+              <a:ext cx="4810716" cy="3301175"/>
             </a:xfrm>
             <a:custGeom>
               <a:avLst/>
               <a:pathLst>
-                <a:path w="4904881" h="3292296">
+                <a:path w="4810716" h="3301175">
                   <a:moveTo>
                     <a:pt x="0" y="0"/>
                   </a:moveTo>
                   <a:lnTo>
-                    <a:pt x="34549" y="71230"/>
-                  </a:lnTo>
-                  <a:lnTo>
-                    <a:pt x="106171" y="212770"/>
-                  </a:lnTo>
-                  <a:lnTo>
-                    <a:pt x="177794" y="348439"/>
-                  </a:lnTo>
-                  <a:lnTo>
-                    <a:pt x="249416" y="478481"/>
-                  </a:lnTo>
-                  <a:lnTo>
-                    <a:pt x="321039" y="603129"/>
-                  </a:lnTo>
-                  <a:lnTo>
-                    <a:pt x="392661" y="722608"/>
-                  </a:lnTo>
-                  <a:lnTo>
-                    <a:pt x="464284" y="837131"/>
-                  </a:lnTo>
-                  <a:lnTo>
-                    <a:pt x="535906" y="946904"/>
-                  </a:lnTo>
-                  <a:lnTo>
-                    <a:pt x="607529" y="1052123"/>
-                  </a:lnTo>
-                  <a:lnTo>
-                    <a:pt x="679152" y="1152979"/>
-                  </a:lnTo>
-                  <a:lnTo>
-                    <a:pt x="750774" y="1249651"/>
-                  </a:lnTo>
-                  <a:lnTo>
-                    <a:pt x="822397" y="1342314"/>
-                  </a:lnTo>
-                  <a:lnTo>
-                    <a:pt x="894019" y="1431134"/>
-                  </a:lnTo>
-                  <a:lnTo>
-                    <a:pt x="965642" y="1516269"/>
-                  </a:lnTo>
-                  <a:lnTo>
-                    <a:pt x="1037264" y="1597874"/>
-                  </a:lnTo>
-                  <a:lnTo>
-                    <a:pt x="1108887" y="1676093"/>
-                  </a:lnTo>
-                  <a:lnTo>
-                    <a:pt x="1180509" y="1751069"/>
-                  </a:lnTo>
-                  <a:lnTo>
-                    <a:pt x="1252132" y="1822935"/>
-                  </a:lnTo>
-                  <a:lnTo>
-                    <a:pt x="1323754" y="1891820"/>
-                  </a:lnTo>
-                  <a:lnTo>
-                    <a:pt x="1395377" y="1957847"/>
-                  </a:lnTo>
-                  <a:lnTo>
-                    <a:pt x="1466999" y="2021137"/>
-                  </a:lnTo>
-                  <a:lnTo>
-                    <a:pt x="1538622" y="2081801"/>
-                  </a:lnTo>
-                  <a:lnTo>
-                    <a:pt x="1610244" y="2139949"/>
-                  </a:lnTo>
-                  <a:lnTo>
-                    <a:pt x="1681867" y="2195685"/>
-                  </a:lnTo>
-                  <a:lnTo>
-                    <a:pt x="1753489" y="2249110"/>
-                  </a:lnTo>
-                  <a:lnTo>
-                    <a:pt x="1825112" y="2300318"/>
-                  </a:lnTo>
-                  <a:lnTo>
-                    <a:pt x="1896734" y="2349403"/>
-                  </a:lnTo>
-                  <a:lnTo>
-                    <a:pt x="1968357" y="2396452"/>
-                  </a:lnTo>
-                  <a:lnTo>
-                    <a:pt x="2039980" y="2441549"/>
-                  </a:lnTo>
-                  <a:lnTo>
-                    <a:pt x="2111602" y="2484776"/>
-                  </a:lnTo>
-                  <a:lnTo>
-                    <a:pt x="2183225" y="2526210"/>
-                  </a:lnTo>
-                  <a:lnTo>
-                    <a:pt x="2254847" y="2565925"/>
-                  </a:lnTo>
-                  <a:lnTo>
-                    <a:pt x="2326470" y="2603993"/>
-                  </a:lnTo>
-                  <a:lnTo>
-                    <a:pt x="2398092" y="2640483"/>
-                  </a:lnTo>
-                  <a:lnTo>
-                    <a:pt x="2469715" y="2675458"/>
-                  </a:lnTo>
-                  <a:lnTo>
-                    <a:pt x="2541337" y="2708984"/>
-                  </a:lnTo>
-                  <a:lnTo>
-                    <a:pt x="2612960" y="2741118"/>
-                  </a:lnTo>
-                  <a:lnTo>
-                    <a:pt x="2684582" y="2771920"/>
-                  </a:lnTo>
-                  <a:lnTo>
-                    <a:pt x="2756205" y="2801444"/>
-                  </a:lnTo>
-                  <a:lnTo>
-                    <a:pt x="2827827" y="2829744"/>
-                  </a:lnTo>
-                  <a:lnTo>
-                    <a:pt x="2899450" y="2856870"/>
-                  </a:lnTo>
-                  <a:lnTo>
-                    <a:pt x="2971072" y="2882870"/>
-                  </a:lnTo>
-                  <a:lnTo>
-                    <a:pt x="3042695" y="2907793"/>
-                  </a:lnTo>
-                  <a:lnTo>
-                    <a:pt x="3114317" y="2931681"/>
-                  </a:lnTo>
-                  <a:lnTo>
-                    <a:pt x="3185940" y="2954579"/>
-                  </a:lnTo>
-                  <a:lnTo>
-                    <a:pt x="3257562" y="2976527"/>
-                  </a:lnTo>
-                  <a:lnTo>
-                    <a:pt x="3329185" y="2997565"/>
-                  </a:lnTo>
-                  <a:lnTo>
-                    <a:pt x="3400808" y="3017730"/>
-                  </a:lnTo>
-                  <a:lnTo>
-                    <a:pt x="3472430" y="3037059"/>
-                  </a:lnTo>
-                  <a:lnTo>
-                    <a:pt x="3544053" y="3055586"/>
-                  </a:lnTo>
-                  <a:lnTo>
-                    <a:pt x="3615675" y="3073345"/>
-                  </a:lnTo>
-                  <a:lnTo>
-                    <a:pt x="3687298" y="3090367"/>
-                  </a:lnTo>
-                  <a:lnTo>
-                    <a:pt x="3758920" y="3106683"/>
-                  </a:lnTo>
-                  <a:lnTo>
-                    <a:pt x="3830543" y="3122322"/>
-                  </a:lnTo>
-                  <a:lnTo>
-                    <a:pt x="3902165" y="3137313"/>
-                  </a:lnTo>
-                  <a:lnTo>
-                    <a:pt x="3973788" y="3151682"/>
-                  </a:lnTo>
-                  <a:lnTo>
-                    <a:pt x="4045410" y="3165455"/>
-                  </a:lnTo>
-                  <a:lnTo>
-                    <a:pt x="4117033" y="3178656"/>
-                  </a:lnTo>
-                  <a:lnTo>
-                    <a:pt x="4188655" y="3191311"/>
-                  </a:lnTo>
-                  <a:lnTo>
-                    <a:pt x="4260278" y="3203440"/>
-                  </a:lnTo>
-                  <a:lnTo>
-                    <a:pt x="4331900" y="3215066"/>
-                  </a:lnTo>
-                  <a:lnTo>
-                    <a:pt x="4403523" y="3226210"/>
-                  </a:lnTo>
-                  <a:lnTo>
-                    <a:pt x="4475145" y="3236892"/>
-                  </a:lnTo>
-                  <a:lnTo>
-                    <a:pt x="4546768" y="3247130"/>
-                  </a:lnTo>
-                  <a:lnTo>
-                    <a:pt x="4618390" y="3256945"/>
-                  </a:lnTo>
-                  <a:lnTo>
-                    <a:pt x="4690013" y="3266352"/>
-                  </a:lnTo>
-                  <a:lnTo>
-                    <a:pt x="4761636" y="3275368"/>
-                  </a:lnTo>
-                  <a:lnTo>
-                    <a:pt x="4833258" y="3284011"/>
-                  </a:lnTo>
-                  <a:lnTo>
-                    <a:pt x="4904881" y="3292296"/>
+                    <a:pt x="12007" y="26013"/>
+                  </a:lnTo>
+                  <a:lnTo>
+                    <a:pt x="83629" y="174520"/>
+                  </a:lnTo>
+                  <a:lnTo>
+                    <a:pt x="155252" y="316649"/>
+                  </a:lnTo>
+                  <a:lnTo>
+                    <a:pt x="226874" y="452674"/>
+                  </a:lnTo>
+                  <a:lnTo>
+                    <a:pt x="298497" y="582856"/>
+                  </a:lnTo>
+                  <a:lnTo>
+                    <a:pt x="370119" y="707448"/>
+                  </a:lnTo>
+                  <a:lnTo>
+                    <a:pt x="441742" y="826688"/>
+                  </a:lnTo>
+                  <a:lnTo>
+                    <a:pt x="513364" y="940806"/>
+                  </a:lnTo>
+                  <a:lnTo>
+                    <a:pt x="584987" y="1050024"/>
+                  </a:lnTo>
+                  <a:lnTo>
+                    <a:pt x="656609" y="1154551"/>
+                  </a:lnTo>
+                  <a:lnTo>
+                    <a:pt x="728232" y="1254588"/>
+                  </a:lnTo>
+                  <a:lnTo>
+                    <a:pt x="799854" y="1350329"/>
+                  </a:lnTo>
+                  <a:lnTo>
+                    <a:pt x="871477" y="1441958"/>
+                  </a:lnTo>
+                  <a:lnTo>
+                    <a:pt x="943099" y="1529651"/>
+                  </a:lnTo>
+                  <a:lnTo>
+                    <a:pt x="1014722" y="1613578"/>
+                  </a:lnTo>
+                  <a:lnTo>
+                    <a:pt x="1086344" y="1693900"/>
+                  </a:lnTo>
+                  <a:lnTo>
+                    <a:pt x="1157967" y="1770773"/>
+                  </a:lnTo>
+                  <a:lnTo>
+                    <a:pt x="1229590" y="1844344"/>
+                  </a:lnTo>
+                  <a:lnTo>
+                    <a:pt x="1301212" y="1914755"/>
+                  </a:lnTo>
+                  <a:lnTo>
+                    <a:pt x="1372835" y="1982142"/>
+                  </a:lnTo>
+                  <a:lnTo>
+                    <a:pt x="1444457" y="2046635"/>
+                  </a:lnTo>
+                  <a:lnTo>
+                    <a:pt x="1516080" y="2108358"/>
+                  </a:lnTo>
+                  <a:lnTo>
+                    <a:pt x="1587702" y="2167430"/>
+                  </a:lnTo>
+                  <a:lnTo>
+                    <a:pt x="1659325" y="2223965"/>
+                  </a:lnTo>
+                  <a:lnTo>
+                    <a:pt x="1730947" y="2278072"/>
+                  </a:lnTo>
+                  <a:lnTo>
+                    <a:pt x="1802570" y="2329854"/>
+                  </a:lnTo>
+                  <a:lnTo>
+                    <a:pt x="1874192" y="2379413"/>
+                  </a:lnTo>
+                  <a:lnTo>
+                    <a:pt x="1945815" y="2426844"/>
+                  </a:lnTo>
+                  <a:lnTo>
+                    <a:pt x="2017437" y="2472237"/>
+                  </a:lnTo>
+                  <a:lnTo>
+                    <a:pt x="2089060" y="2515681"/>
+                  </a:lnTo>
+                  <a:lnTo>
+                    <a:pt x="2160682" y="2557258"/>
+                  </a:lnTo>
+                  <a:lnTo>
+                    <a:pt x="2232305" y="2597050"/>
+                  </a:lnTo>
+                  <a:lnTo>
+                    <a:pt x="2303927" y="2635133"/>
+                  </a:lnTo>
+                  <a:lnTo>
+                    <a:pt x="2375550" y="2671581"/>
+                  </a:lnTo>
+                  <a:lnTo>
+                    <a:pt x="2447172" y="2706463"/>
+                  </a:lnTo>
+                  <a:lnTo>
+                    <a:pt x="2518795" y="2739846"/>
+                  </a:lnTo>
+                  <a:lnTo>
+                    <a:pt x="2590418" y="2771796"/>
+                  </a:lnTo>
+                  <a:lnTo>
+                    <a:pt x="2662040" y="2802374"/>
+                  </a:lnTo>
+                  <a:lnTo>
+                    <a:pt x="2733663" y="2831639"/>
+                  </a:lnTo>
+                  <a:lnTo>
+                    <a:pt x="2805285" y="2859646"/>
+                  </a:lnTo>
+                  <a:lnTo>
+                    <a:pt x="2876908" y="2886451"/>
+                  </a:lnTo>
+                  <a:lnTo>
+                    <a:pt x="2948530" y="2912104"/>
+                  </a:lnTo>
+                  <a:lnTo>
+                    <a:pt x="3020153" y="2936656"/>
+                  </a:lnTo>
+                  <a:lnTo>
+                    <a:pt x="3091775" y="2960153"/>
+                  </a:lnTo>
+                  <a:lnTo>
+                    <a:pt x="3163398" y="2982641"/>
+                  </a:lnTo>
+                  <a:lnTo>
+                    <a:pt x="3235020" y="3004163"/>
+                  </a:lnTo>
+                  <a:lnTo>
+                    <a:pt x="3306643" y="3024761"/>
+                  </a:lnTo>
+                  <a:lnTo>
+                    <a:pt x="3378265" y="3044474"/>
+                  </a:lnTo>
+                  <a:lnTo>
+                    <a:pt x="3449888" y="3063340"/>
+                  </a:lnTo>
+                  <a:lnTo>
+                    <a:pt x="3521510" y="3081397"/>
+                  </a:lnTo>
+                  <a:lnTo>
+                    <a:pt x="3593133" y="3098677"/>
+                  </a:lnTo>
+                  <a:lnTo>
+                    <a:pt x="3664755" y="3115216"/>
+                  </a:lnTo>
+                  <a:lnTo>
+                    <a:pt x="3736378" y="3131044"/>
+                  </a:lnTo>
+                  <a:lnTo>
+                    <a:pt x="3808000" y="3146192"/>
+                  </a:lnTo>
+                  <a:lnTo>
+                    <a:pt x="3879623" y="3160690"/>
+                  </a:lnTo>
+                  <a:lnTo>
+                    <a:pt x="3951246" y="3174565"/>
+                  </a:lnTo>
+                  <a:lnTo>
+                    <a:pt x="4022868" y="3187844"/>
+                  </a:lnTo>
+                  <a:lnTo>
+                    <a:pt x="4094491" y="3200553"/>
+                  </a:lnTo>
+                  <a:lnTo>
+                    <a:pt x="4166113" y="3212716"/>
+                  </a:lnTo>
+                  <a:lnTo>
+                    <a:pt x="4237736" y="3224356"/>
+                  </a:lnTo>
+                  <a:lnTo>
+                    <a:pt x="4309358" y="3235497"/>
+                  </a:lnTo>
+                  <a:lnTo>
+                    <a:pt x="4380981" y="3246159"/>
+                  </a:lnTo>
+                  <a:lnTo>
+                    <a:pt x="4452603" y="3256363"/>
+                  </a:lnTo>
+                  <a:lnTo>
+                    <a:pt x="4524226" y="3266129"/>
+                  </a:lnTo>
+                  <a:lnTo>
+                    <a:pt x="4595848" y="3275476"/>
+                  </a:lnTo>
+                  <a:lnTo>
+                    <a:pt x="4667471" y="3284421"/>
+                  </a:lnTo>
+                  <a:lnTo>
+                    <a:pt x="4739093" y="3292982"/>
+                  </a:lnTo>
+                  <a:lnTo>
+                    <a:pt x="4810716" y="3301175"/>
                   </a:lnTo>
                 </a:path>
               </a:pathLst>
@@ -4211,7 +4202,7 @@
           </p:nvSpPr>
           <p:spPr>
             <a:xfrm>
-              <a:off x="5783789" y="2073503"/>
+              <a:off x="5793129" y="2073503"/>
               <a:ext cx="0" cy="3649639"/>
             </a:xfrm>
             <a:custGeom>
@@ -4254,7 +4245,7 @@
           </p:nvSpPr>
           <p:spPr>
             <a:xfrm>
-              <a:off x="4658599" y="2073503"/>
+              <a:off x="4667548" y="2073503"/>
               <a:ext cx="0" cy="3649639"/>
             </a:xfrm>
             <a:custGeom>
@@ -4297,7 +4288,7 @@
           </p:nvSpPr>
           <p:spPr>
             <a:xfrm>
-              <a:off x="6864197" y="2073503"/>
+              <a:off x="6868063" y="2073503"/>
               <a:ext cx="0" cy="3649639"/>
             </a:xfrm>
             <a:custGeom>
@@ -4570,7 +4561,7 @@
           </p:nvSpPr>
           <p:spPr>
             <a:xfrm>
-              <a:off x="3120823" y="5785772"/>
+              <a:off x="3120990" y="5785772"/>
               <a:ext cx="161574" cy="80101"/>
             </a:xfrm>
             <a:prstGeom prst="rect">
@@ -4616,7 +4607,7 @@
           </p:nvSpPr>
           <p:spPr>
             <a:xfrm>
-              <a:off x="5688698" y="5785772"/>
+              <a:off x="5688107" y="5785772"/>
               <a:ext cx="62179" cy="80101"/>
             </a:xfrm>
             <a:prstGeom prst="rect">
@@ -4662,7 +4653,7 @@
           </p:nvSpPr>
           <p:spPr>
             <a:xfrm>
-              <a:off x="8175787" y="5785772"/>
+              <a:off x="8174437" y="5785772"/>
               <a:ext cx="124358" cy="80101"/>
             </a:xfrm>
             <a:prstGeom prst="rect">
@@ -4833,7 +4824,7 @@
                   <a:latin typeface="Helvetica"/>
                   <a:cs typeface="Helvetica"/>
                 </a:rPr>
-                <a:t>subHR per 10 mL/min decline: 1.81 (1.04-3.16), p_Bonf = 0.210 (n = 6)  |  per IQR decline (Δ = 21.9): 3.69 (1.10-12.39)  |  IQR: [-10.5, 11.4]</a:t>
+                <a:t>subHR per 10 mL/min decline: 1.85 (1.05-3.27), p_Bonf = 0.197 (n = 6)  |  per IQR decline (Δ = 21.9): 3.85 (1.12-13.30)  |  IQR: [-10.4, 11.4]</a:t>
               </a:r>
             </a:p>
           </p:txBody>
